--- a/tmp-tj/261029_Proline_audit-reseaux-sociaux_v2.pptx
+++ b/tmp-tj/261029_Proline_audit-reseaux-sociaux_v2.pptx
@@ -33633,7 +33633,7 @@
     </a:clrScheme>
     <a:fontScheme name="Office">
       <a:majorFont>
-        <a:latin typeface="Calibri"/>
+        <a:latin typeface="Montserrat"/>
         <a:ea typeface=""/>
         <a:cs typeface=""/>
         <a:font script="Jpan" typeface="ＭＳ Ｐゴシック"/>
@@ -33668,7 +33668,7 @@
         <a:font script="Geor" typeface="Sylfaen"/>
       </a:majorFont>
       <a:minorFont>
-        <a:latin typeface="Calibri"/>
+        <a:latin typeface="Montserrat"/>
         <a:ea typeface=""/>
         <a:cs typeface=""/>
         <a:font script="Jpan" typeface="ＭＳ Ｐゴシック"/>
